--- a/assets/多空阶段简报_2026-10-23.pptx
+++ b/assets/多空阶段简报_2026-10-23.pptx
@@ -334,25 +334,25 @@
                   <c:v>半导体芯片</c:v>
                 </c:pt>
                 <c:pt idx="2">
+                  <c:v>存储</c:v>
+                </c:pt>
+                <c:pt idx="3">
                   <c:v>算力</c:v>
                 </c:pt>
-                <c:pt idx="3">
+                <c:pt idx="4">
                   <c:v>光上游</c:v>
                 </c:pt>
-                <c:pt idx="4">
+                <c:pt idx="5">
                   <c:v>药</c:v>
                 </c:pt>
-                <c:pt idx="5">
+                <c:pt idx="6">
+                  <c:v>MLCC</c:v>
+                </c:pt>
+                <c:pt idx="7">
                   <c:v>半导体设备</c:v>
                 </c:pt>
-                <c:pt idx="6">
+                <c:pt idx="8">
                   <c:v>AI应用</c:v>
-                </c:pt>
-                <c:pt idx="7">
-                  <c:v>PCB</c:v>
-                </c:pt>
-                <c:pt idx="8">
-                  <c:v>商业航天</c:v>
                 </c:pt>
               </c:strCache>
             </c:strRef>
@@ -361,34 +361,34 @@
             <c:numRef>
               <c:f>Sheet1!$B$2:$B$10</c:f>
               <c:numCache>
-                <c:formatCode>0</c:formatCode>
+                <c:formatCode>General</c:formatCode>
                 <c:ptCount val="9"/>
                 <c:pt idx="0">
-                  <c:v>6.0</c:v>
+                  <c:v>6</c:v>
                 </c:pt>
                 <c:pt idx="1">
-                  <c:v>17.0</c:v>
+                  <c:v>17</c:v>
                 </c:pt>
                 <c:pt idx="2">
-                  <c:v>17.0</c:v>
+                  <c:v>4</c:v>
                 </c:pt>
                 <c:pt idx="3">
-                  <c:v>6.0</c:v>
+                  <c:v>17</c:v>
                 </c:pt>
                 <c:pt idx="4">
-                  <c:v>28.0</c:v>
+                  <c:v>6</c:v>
                 </c:pt>
                 <c:pt idx="5">
-                  <c:v>6.0</c:v>
+                  <c:v>28</c:v>
                 </c:pt>
                 <c:pt idx="6">
-                  <c:v>11.0</c:v>
+                  <c:v>4</c:v>
                 </c:pt>
                 <c:pt idx="7">
-                  <c:v>6.0</c:v>
+                  <c:v>6</c:v>
                 </c:pt>
                 <c:pt idx="8">
-                  <c:v>1.0</c:v>
+                  <c:v>11</c:v>
                 </c:pt>
               </c:numCache>
             </c:numRef>
@@ -451,25 +451,25 @@
                   <c:v>半导体芯片</c:v>
                 </c:pt>
                 <c:pt idx="2">
+                  <c:v>存储</c:v>
+                </c:pt>
+                <c:pt idx="3">
                   <c:v>算力</c:v>
                 </c:pt>
-                <c:pt idx="3">
+                <c:pt idx="4">
                   <c:v>光上游</c:v>
                 </c:pt>
-                <c:pt idx="4">
+                <c:pt idx="5">
                   <c:v>药</c:v>
                 </c:pt>
-                <c:pt idx="5">
+                <c:pt idx="6">
+                  <c:v>MLCC</c:v>
+                </c:pt>
+                <c:pt idx="7">
                   <c:v>半导体设备</c:v>
                 </c:pt>
-                <c:pt idx="6">
+                <c:pt idx="8">
                   <c:v>AI应用</c:v>
-                </c:pt>
-                <c:pt idx="7">
-                  <c:v>PCB</c:v>
-                </c:pt>
-                <c:pt idx="8">
-                  <c:v>商业航天</c:v>
                 </c:pt>
               </c:strCache>
             </c:strRef>
@@ -478,34 +478,34 @@
             <c:numRef>
               <c:f>Sheet1!$C$2:$C$10</c:f>
               <c:numCache>
-                <c:formatCode>0</c:formatCode>
+                <c:formatCode>General</c:formatCode>
                 <c:ptCount val="9"/>
                 <c:pt idx="0">
-                  <c:v>23.0</c:v>
+                  <c:v>23</c:v>
                 </c:pt>
                 <c:pt idx="1">
-                  <c:v>7.0</c:v>
+                  <c:v>7</c:v>
                 </c:pt>
                 <c:pt idx="2">
-                  <c:v>9.0</c:v>
+                  <c:v>1</c:v>
                 </c:pt>
                 <c:pt idx="3">
-                  <c:v>2.0</c:v>
+                  <c:v>9</c:v>
                 </c:pt>
                 <c:pt idx="4">
-                  <c:v>3.0</c:v>
+                  <c:v>2</c:v>
                 </c:pt>
                 <c:pt idx="5">
-                  <c:v>2.0</c:v>
+                  <c:v>3</c:v>
                 </c:pt>
                 <c:pt idx="6">
-                  <c:v>5.0</c:v>
+                  <c:v>0</c:v>
                 </c:pt>
                 <c:pt idx="7">
-                  <c:v>2.0</c:v>
+                  <c:v>2</c:v>
                 </c:pt>
                 <c:pt idx="8">
-                  <c:v>9.0</c:v>
+                  <c:v>5</c:v>
                 </c:pt>
               </c:numCache>
             </c:numRef>
@@ -545,25 +545,25 @@
                   <c:v>半导体芯片</c:v>
                 </c:pt>
                 <c:pt idx="2">
+                  <c:v>存储</c:v>
+                </c:pt>
+                <c:pt idx="3">
                   <c:v>算力</c:v>
                 </c:pt>
-                <c:pt idx="3">
+                <c:pt idx="4">
                   <c:v>光上游</c:v>
                 </c:pt>
-                <c:pt idx="4">
+                <c:pt idx="5">
                   <c:v>药</c:v>
                 </c:pt>
-                <c:pt idx="5">
+                <c:pt idx="6">
+                  <c:v>MLCC</c:v>
+                </c:pt>
+                <c:pt idx="7">
                   <c:v>半导体设备</c:v>
                 </c:pt>
-                <c:pt idx="6">
+                <c:pt idx="8">
                   <c:v>AI应用</c:v>
-                </c:pt>
-                <c:pt idx="7">
-                  <c:v>PCB</c:v>
-                </c:pt>
-                <c:pt idx="8">
-                  <c:v>商业航天</c:v>
                 </c:pt>
               </c:strCache>
             </c:strRef>
@@ -572,34 +572,34 @@
             <c:numRef>
               <c:f>Sheet1!$D$2:$D$10</c:f>
               <c:numCache>
-                <c:formatCode>0</c:formatCode>
+                <c:formatCode>General</c:formatCode>
                 <c:ptCount val="9"/>
                 <c:pt idx="0">
-                  <c:v>0.0</c:v>
+                  <c:v>0</c:v>
                 </c:pt>
                 <c:pt idx="1">
-                  <c:v>0.0</c:v>
+                  <c:v>0</c:v>
                 </c:pt>
                 <c:pt idx="2">
-                  <c:v>1.0</c:v>
+                  <c:v>0</c:v>
                 </c:pt>
                 <c:pt idx="3">
-                  <c:v>0.0</c:v>
+                  <c:v>1</c:v>
                 </c:pt>
                 <c:pt idx="4">
-                  <c:v>0.0</c:v>
+                  <c:v>0</c:v>
                 </c:pt>
                 <c:pt idx="5">
-                  <c:v>0.0</c:v>
+                  <c:v>0</c:v>
                 </c:pt>
                 <c:pt idx="6">
-                  <c:v>0.0</c:v>
+                  <c:v>0</c:v>
                 </c:pt>
                 <c:pt idx="7">
-                  <c:v>1.0</c:v>
+                  <c:v>0</c:v>
                 </c:pt>
                 <c:pt idx="8">
-                  <c:v>0.0</c:v>
+                  <c:v>0</c:v>
                 </c:pt>
               </c:numCache>
             </c:numRef>
@@ -777,10 +777,10 @@
                   <c:v>机器人</c:v>
                 </c:pt>
                 <c:pt idx="1">
-                  <c:v>存储</c:v>
+                  <c:v>半导体芯片</c:v>
                 </c:pt>
                 <c:pt idx="2">
-                  <c:v>半导体芯片</c:v>
+                  <c:v>存储</c:v>
                 </c:pt>
                 <c:pt idx="3">
                   <c:v>算力</c:v>
@@ -789,10 +789,10 @@
                   <c:v>光上游</c:v>
                 </c:pt>
                 <c:pt idx="5">
-                  <c:v>MLCC</c:v>
+                  <c:v>药</c:v>
                 </c:pt>
                 <c:pt idx="6">
-                  <c:v>药</c:v>
+                  <c:v>MLCC</c:v>
                 </c:pt>
                 <c:pt idx="7">
                   <c:v>半导体设备</c:v>
@@ -807,16 +807,16 @@
             <c:numRef>
               <c:f>Sheet1!$B$2:$B$10</c:f>
               <c:numCache>
-                <c:formatCode>0.0</c:formatCode>
+                <c:formatCode>General</c:formatCode>
                 <c:ptCount val="9"/>
                 <c:pt idx="0">
                   <c:v>72.9</c:v>
                 </c:pt>
                 <c:pt idx="1">
-                  <c:v>72.7</c:v>
+                  <c:v>59.6</c:v>
                 </c:pt>
                 <c:pt idx="2">
-                  <c:v>59.6</c:v>
+                  <c:v>54.5</c:v>
                 </c:pt>
                 <c:pt idx="3">
                   <c:v>49.3</c:v>
@@ -825,10 +825,10 @@
                   <c:v>25.6</c:v>
                 </c:pt>
                 <c:pt idx="5">
-                  <c:v>25.0</c:v>
+                  <c:v>24.8</c:v>
                 </c:pt>
                 <c:pt idx="6">
-                  <c:v>24.1</c:v>
+                  <c:v>23.5</c:v>
                 </c:pt>
                 <c:pt idx="7">
                   <c:v>22.2</c:v>
@@ -1351,7 +1351,7 @@
           <a:lstStyle/>
           <a:p>
             <a:r>
-              <a:t>当日共 17 个分组；改善 15、恶化 1。转多力度第一为 机器人，强度 72.86。空→多直接跳级 2 个。</a:t>
+              <a:t>当日共 17 个分组；改善 15、恶化 1。转多力度第一为 机器人，强度 72.86。最强低位转势候选为 半导体芯片。</a:t>
             </a:r>
           </a:p>
         </p:txBody>
@@ -1421,7 +1421,7 @@
           <a:lstStyle/>
           <a:p>
             <a:r>
-              <a:t>堆叠柱分别代表空转空转多、空转多转多、空直接转多。后两者更接近真实兑现，空转空转多则是下一轮候选。</a:t>
+              <a:t>堆叠柱分别代表空转空转多、空转多转多、空直接转多。后两者更接近真实转多确认，空转空转多则是下一轮候选。最强低位转势候选：半导体芯片。</a:t>
             </a:r>
           </a:p>
         </p:txBody>
@@ -4697,7 +4697,7 @@
                 </a:solidFill>
                 <a:latin typeface="Microsoft YaHei"/>
               </a:rPr>
-              <a:t>从 MA5 / MA10 四阶段看结构切换，聚焦转多兑现与次日扩散</a:t>
+              <a:t>从 MA5 / MA10 四阶段看结构切换，聚焦转多确认与次日扩散</a:t>
             </a:r>
           </a:p>
         </p:txBody>
@@ -5794,7 +5794,7 @@
                 </a:solidFill>
                 <a:latin typeface="Microsoft YaHei"/>
               </a:rPr>
-              <a:t>机器人为转多力度第一，空转多→多 23 只（前日 13）。全市场出现 2 个空→多跳级：PCB·华锐精密(688059)、算力·深圳华强(000062)。次日重点看强组能否继续兑现，同时提防商业航天、AI应用等反向转空。</a:t>
+              <a:t>机器人转多确认最强，半导体芯片以多占比 13.5% 成为最强低位转势候选，但同时提防商业航天、AI应用等反向转空。</a:t>
             </a:r>
           </a:p>
         </p:txBody>
@@ -5816,7 +5816,7 @@
             </a:avLst>
           </a:prstGeom>
           <a:solidFill>
-            <a:srgbClr val="FCEDED"/>
+            <a:srgbClr val="EBF3FC"/>
           </a:solidFill>
           <a:ln>
             <a:noFill/>
@@ -5852,8 +5852,8 @@
         </p:nvSpPr>
         <p:spPr>
           <a:xfrm>
-            <a:off x="5715000" y="5340096"/>
-            <a:ext cx="777240" cy="182880"/>
+            <a:off x="5696712" y="5340096"/>
+            <a:ext cx="640080" cy="182880"/>
           </a:xfrm>
           <a:prstGeom prst="rect">
             <a:avLst/>
@@ -5875,13 +5875,13 @@
               </a:spcAft>
             </a:pPr>
             <a:r>
-              <a:rPr sz="850" b="0" i="0">
+              <a:rPr sz="800" b="0" i="0">
                 <a:solidFill>
                   <a:srgbClr val="657484"/>
                 </a:solidFill>
                 <a:latin typeface="Microsoft YaHei"/>
               </a:rPr>
-              <a:t>最强兑现</a:t>
+              <a:t>低位候选</a:t>
             </a:r>
           </a:p>
         </p:txBody>
@@ -5894,8 +5894,8 @@
         </p:nvSpPr>
         <p:spPr>
           <a:xfrm>
-            <a:off x="6437375" y="5321807"/>
-            <a:ext cx="731520" cy="274320"/>
+            <a:off x="6217920" y="5321807"/>
+            <a:ext cx="1005840" cy="310896"/>
           </a:xfrm>
           <a:prstGeom prst="rect">
             <a:avLst/>
@@ -5917,13 +5917,13 @@
               </a:spcAft>
             </a:pPr>
             <a:r>
-              <a:rPr sz="1400" b="1" i="0">
+              <a:rPr sz="1050" b="1" i="0">
                 <a:solidFill>
-                  <a:srgbClr val="D34347"/>
+                  <a:srgbClr val="366FAA"/>
                 </a:solidFill>
                 <a:latin typeface="Microsoft YaHei"/>
               </a:rPr>
-              <a:t>23 只</a:t>
+              <a:t>半导体芯片</a:t>
             </a:r>
           </a:p>
         </p:txBody>
@@ -5945,7 +5945,7 @@
             </a:avLst>
           </a:prstGeom>
           <a:solidFill>
-            <a:srgbClr val="FFF7E2"/>
+            <a:srgbClr val="FCEDED"/>
           </a:solidFill>
           <a:ln>
             <a:noFill/>
@@ -5981,8 +5981,8 @@
         </p:nvSpPr>
         <p:spPr>
           <a:xfrm>
-            <a:off x="7653527" y="5340096"/>
-            <a:ext cx="777240" cy="182880"/>
+            <a:off x="7635240" y="5340096"/>
+            <a:ext cx="640080" cy="182880"/>
           </a:xfrm>
           <a:prstGeom prst="rect">
             <a:avLst/>
@@ -6004,13 +6004,13 @@
               </a:spcAft>
             </a:pPr>
             <a:r>
-              <a:rPr sz="850" b="0" i="0">
+              <a:rPr sz="800" b="0" i="0">
                 <a:solidFill>
                   <a:srgbClr val="657484"/>
                 </a:solidFill>
                 <a:latin typeface="Microsoft YaHei"/>
               </a:rPr>
-              <a:t>重点分组</a:t>
+              <a:t>转多确认最强</a:t>
             </a:r>
           </a:p>
         </p:txBody>
@@ -6023,8 +6023,8 @@
         </p:nvSpPr>
         <p:spPr>
           <a:xfrm>
-            <a:off x="8375903" y="5321807"/>
-            <a:ext cx="731520" cy="274320"/>
+            <a:off x="8156447" y="5321807"/>
+            <a:ext cx="1005840" cy="310896"/>
           </a:xfrm>
           <a:prstGeom prst="rect">
             <a:avLst/>
@@ -6046,13 +6046,13 @@
               </a:spcAft>
             </a:pPr>
             <a:r>
-              <a:rPr sz="1400" b="1" i="0">
+              <a:rPr sz="1350" b="1" i="0">
                 <a:solidFill>
-                  <a:srgbClr val="E88B36"/>
+                  <a:srgbClr val="D34347"/>
                 </a:solidFill>
                 <a:latin typeface="Microsoft YaHei"/>
               </a:rPr>
-              <a:t>7 个</a:t>
+              <a:t>23 只</a:t>
             </a:r>
           </a:p>
         </p:txBody>
@@ -6074,7 +6074,7 @@
             </a:avLst>
           </a:prstGeom>
           <a:solidFill>
-            <a:srgbClr val="EBF7F0"/>
+            <a:srgbClr val="FFF7E2"/>
           </a:solidFill>
           <a:ln>
             <a:noFill/>
@@ -6110,8 +6110,8 @@
         </p:nvSpPr>
         <p:spPr>
           <a:xfrm>
-            <a:off x="9592056" y="5340096"/>
-            <a:ext cx="777240" cy="182880"/>
+            <a:off x="9573768" y="5340096"/>
+            <a:ext cx="640080" cy="182880"/>
           </a:xfrm>
           <a:prstGeom prst="rect">
             <a:avLst/>
@@ -6133,13 +6133,13 @@
               </a:spcAft>
             </a:pPr>
             <a:r>
-              <a:rPr sz="850" b="0" i="0">
+              <a:rPr sz="800" b="0" i="0">
                 <a:solidFill>
                   <a:srgbClr val="657484"/>
                 </a:solidFill>
                 <a:latin typeface="Microsoft YaHei"/>
               </a:rPr>
-              <a:t>转空加速</a:t>
+              <a:t>重点分组</a:t>
             </a:r>
           </a:p>
         </p:txBody>
@@ -6152,8 +6152,8 @@
         </p:nvSpPr>
         <p:spPr>
           <a:xfrm>
-            <a:off x="10314432" y="5321807"/>
-            <a:ext cx="731520" cy="274320"/>
+            <a:off x="10094976" y="5321807"/>
+            <a:ext cx="1005840" cy="310896"/>
           </a:xfrm>
           <a:prstGeom prst="rect">
             <a:avLst/>
@@ -6175,13 +6175,13 @@
               </a:spcAft>
             </a:pPr>
             <a:r>
-              <a:rPr sz="1400" b="1" i="0">
+              <a:rPr sz="1350" b="1" i="0">
                 <a:solidFill>
-                  <a:srgbClr val="318C5E"/>
+                  <a:srgbClr val="E88B36"/>
                 </a:solidFill>
                 <a:latin typeface="Microsoft YaHei"/>
               </a:rPr>
-              <a:t>1 个</a:t>
+              <a:t>7 个</a:t>
             </a:r>
           </a:p>
         </p:txBody>
@@ -6333,7 +6333,7 @@
                 </a:solidFill>
                 <a:latin typeface="Microsoft YaHei"/>
               </a:rPr>
-              <a:t>转多结构：先看空转多兑现，还是仍停留在蓄势</a:t>
+              <a:t>转多结构：先看空转多确认，还是仍停留在蓄势</a:t>
             </a:r>
           </a:p>
         </p:txBody>
@@ -6375,7 +6375,7 @@
                 </a:solidFill>
                 <a:latin typeface="Microsoft YaHei"/>
               </a:rPr>
-              <a:t>每组三块：空→空转多（蓄势）、空转多→多（兑现）、空→多（跳级）；按净转多强度从强到弱</a:t>
+              <a:t>按组规模净强度由强到弱；每组三块：空→空转多、空转多→多、空→多；右侧只看组级候选</a:t>
             </a:r>
           </a:p>
         </p:txBody>
@@ -6567,7 +6567,7 @@
                 </a:solidFill>
                 <a:latin typeface="Microsoft YaHei"/>
               </a:rPr>
-              <a:t>最强兑现</a:t>
+              <a:t>转多确认最强</a:t>
             </a:r>
           </a:p>
         </p:txBody>
@@ -6846,7 +6846,7 @@
             </a:avLst>
           </a:prstGeom>
           <a:solidFill>
-            <a:srgbClr val="FFF7E2"/>
+            <a:srgbClr val="EBF3FC"/>
           </a:solidFill>
           <a:ln>
             <a:noFill/>
@@ -6882,7 +6882,7 @@
         </p:nvSpPr>
         <p:spPr>
           <a:xfrm>
-            <a:off x="8385048" y="4736592"/>
+            <a:off x="8385048" y="4718304"/>
             <a:ext cx="2971800" cy="228600"/>
           </a:xfrm>
           <a:prstGeom prst="rect">
@@ -6911,7 +6911,7 @@
                 </a:solidFill>
                 <a:latin typeface="Microsoft YaHei"/>
               </a:rPr>
-              <a:t>空→多跳级个股</a:t>
+              <a:t>最强低位转势候选</a:t>
             </a:r>
           </a:p>
         </p:txBody>
@@ -6924,8 +6924,8 @@
         </p:nvSpPr>
         <p:spPr>
           <a:xfrm>
-            <a:off x="8385048" y="5010912"/>
-            <a:ext cx="2971800" cy="713232"/>
+            <a:off x="8385048" y="4965192"/>
+            <a:ext cx="2971800" cy="310896"/>
           </a:xfrm>
           <a:prstGeom prst="rect">
             <a:avLst/>
@@ -6947,14 +6947,13 @@
               </a:spcAft>
             </a:pPr>
             <a:r>
-              <a:rPr sz="1050" b="1" i="0">
+              <a:rPr sz="1700" b="1" i="0">
                 <a:solidFill>
-                  <a:srgbClr val="A3262F"/>
+                  <a:srgbClr val="366FAA"/>
                 </a:solidFill>
                 <a:latin typeface="Microsoft YaHei"/>
               </a:rPr>
-              <a:t>PCB：华锐精密(688059)
-算力：深圳华强(000062)</a:t>
+              <a:t>半导体芯片</a:t>
             </a:r>
           </a:p>
         </p:txBody>
@@ -6962,6 +6961,48 @@
       <p:sp>
         <p:nvSpPr>
           <p:cNvPr id="18" name="TextBox 17"/>
+          <p:cNvSpPr txBox="1"/>
+          <p:nvPr/>
+        </p:nvSpPr>
+        <p:spPr>
+          <a:xfrm>
+            <a:off x="8385048" y="5330952"/>
+            <a:ext cx="2971800" cy="384048"/>
+          </a:xfrm>
+          <a:prstGeom prst="rect">
+            <a:avLst/>
+          </a:prstGeom>
+          <a:noFill/>
+        </p:spPr>
+        <p:txBody>
+          <a:bodyPr wrap="square" lIns="0" rIns="0" tIns="0" bIns="0" anchor="t">
+            <a:spAutoFit/>
+          </a:bodyPr>
+          <a:lstStyle/>
+          <a:p>
+            <a:pPr algn="l">
+              <a:spcBef>
+                <a:spcPts val="0"/>
+              </a:spcBef>
+              <a:spcAft>
+                <a:spcPts val="0"/>
+              </a:spcAft>
+            </a:pPr>
+            <a:r>
+              <a:rPr sz="910" b="0" i="0">
+                <a:solidFill>
+                  <a:srgbClr val="233242"/>
+                </a:solidFill>
+                <a:latin typeface="Microsoft YaHei"/>
+              </a:rPr>
+              <a:t>多占比 13.5%｜空转多→多 7 只｜空→空转多 17 只</a:t>
+            </a:r>
+          </a:p>
+        </p:txBody>
+      </p:sp>
+      <p:sp>
+        <p:nvSpPr>
+          <p:cNvPr id="19" name="TextBox 18"/>
           <p:cNvSpPr txBox="1"/>
           <p:nvPr/>
         </p:nvSpPr>
@@ -7003,7 +7044,7 @@
       </p:sp>
       <p:sp>
         <p:nvSpPr>
-          <p:cNvPr id="19" name="TextBox 18"/>
+          <p:cNvPr id="20" name="TextBox 19"/>
           <p:cNvSpPr txBox="1"/>
           <p:nvPr/>
         </p:nvSpPr>
@@ -7106,7 +7147,7 @@
                 </a:solidFill>
                 <a:latin typeface="Microsoft YaHei"/>
               </a:rPr>
-              <a:t>转多力度排行：谁在真正兑现</a:t>
+              <a:t>转多力度排行：谁完成了转多确认</a:t>
             </a:r>
           </a:p>
         </p:txBody>
@@ -7148,7 +7189,7 @@
                 </a:solidFill>
                 <a:latin typeface="Microsoft YaHei"/>
               </a:rPr>
-              <a:t>按组规模标准化的净转多强度；跳级权重最高，反向转空计负分</a:t>
+              <a:t>按组规模标准化的净转多强度，由强到弱降序；跳级权重最高，反向转空计负分</a:t>
             </a:r>
           </a:p>
         </p:txBody>
@@ -7496,7 +7537,7 @@
                         </a:defRPr>
                       </a:pPr>
                       <a:r>
-                        <a:t>兑现</a:t>
+                        <a:t>转多确认</a:t>
                       </a:r>
                     </a:p>
                   </a:txBody>
@@ -7644,7 +7685,7 @@
                         </a:defRPr>
                       </a:pPr>
                       <a:r>
-                        <a:t>存储</a:t>
+                        <a:t>半导体芯片</a:t>
                       </a:r>
                     </a:p>
                   </a:txBody>
@@ -7668,7 +7709,7 @@
                         </a:defRPr>
                       </a:pPr>
                       <a:r>
-                        <a:t>72.7</a:t>
+                        <a:t>59.6</a:t>
                       </a:r>
                     </a:p>
                   </a:txBody>
@@ -7692,7 +7733,7 @@
                         </a:defRPr>
                       </a:pPr>
                       <a:r>
-                        <a:t>2只</a:t>
+                        <a:t>7只</a:t>
                       </a:r>
                     </a:p>
                   </a:txBody>
@@ -7742,7 +7783,7 @@
                         </a:defRPr>
                       </a:pPr>
                       <a:r>
-                        <a:t>半导体芯片</a:t>
+                        <a:t>存储</a:t>
                       </a:r>
                     </a:p>
                   </a:txBody>
@@ -7766,7 +7807,7 @@
                         </a:defRPr>
                       </a:pPr>
                       <a:r>
-                        <a:t>59.6</a:t>
+                        <a:t>54.5</a:t>
                       </a:r>
                     </a:p>
                   </a:txBody>
@@ -7790,7 +7831,7 @@
                         </a:defRPr>
                       </a:pPr>
                       <a:r>
-                        <a:t>7只</a:t>
+                        <a:t>1只</a:t>
                       </a:r>
                     </a:p>
                   </a:txBody>
@@ -8036,7 +8077,7 @@
                         </a:defRPr>
                       </a:pPr>
                       <a:r>
-                        <a:t>MLCC</a:t>
+                        <a:t>药</a:t>
                       </a:r>
                     </a:p>
                   </a:txBody>
@@ -8060,7 +8101,7 @@
                         </a:defRPr>
                       </a:pPr>
                       <a:r>
-                        <a:t>25.0</a:t>
+                        <a:t>24.8</a:t>
                       </a:r>
                     </a:p>
                   </a:txBody>
@@ -8084,7 +8125,7 @@
                         </a:defRPr>
                       </a:pPr>
                       <a:r>
-                        <a:t>0只</a:t>
+                        <a:t>3只</a:t>
                       </a:r>
                     </a:p>
                   </a:txBody>
@@ -8288,7 +8329,7 @@
                 </a:solidFill>
                 <a:latin typeface="Microsoft YaHei"/>
               </a:rPr>
-              <a:t>次日关注：先看兑现能否扩散，再排除反向转空</a:t>
+              <a:t>次日关注：先看转多确认能否扩散，再排除反向转空</a:t>
             </a:r>
           </a:p>
         </p:txBody>
@@ -8330,7 +8371,7 @@
                 </a:solidFill>
                 <a:latin typeface="Microsoft YaHei"/>
               </a:rPr>
-              <a:t>按净转多强度从强到弱排列；同步标注兑现、跳级与反向压力</a:t>
+              <a:t>按净转多强度由强到弱降序，只保留组级判断，不再展开个股</a:t>
             </a:r>
           </a:p>
         </p:txBody>
@@ -8667,13 +8708,13 @@
               </a:spcAft>
             </a:pPr>
             <a:r>
-              <a:rPr sz="860" b="0" i="0">
+              <a:rPr sz="880" b="0" i="0">
                 <a:solidFill>
                   <a:srgbClr val="657484"/>
                 </a:solidFill>
                 <a:latin typeface="Microsoft YaHei"/>
               </a:rPr>
-              <a:t>三瑞智能(301696)、宜安科技(300328) 等 23 只</a:t>
+              <a:t>空转多→多 23 只｜空→空转多 6 只｜多占比 70.0%</a:t>
             </a:r>
           </a:p>
         </p:txBody>
@@ -8686,7 +8727,7 @@
         </p:nvSpPr>
         <p:spPr>
           <a:xfrm>
-            <a:off x="8211311" y="1481328"/>
+            <a:off x="4389120" y="1481328"/>
             <a:ext cx="3584448" cy="1682496"/>
           </a:xfrm>
           <a:prstGeom prst="roundRect">
@@ -8733,14 +8774,14 @@
         </p:nvSpPr>
         <p:spPr>
           <a:xfrm>
-            <a:off x="8211311" y="1481328"/>
+            <a:off x="4389120" y="1481328"/>
             <a:ext cx="73152" cy="1682496"/>
           </a:xfrm>
           <a:prstGeom prst="rect">
             <a:avLst/>
           </a:prstGeom>
           <a:solidFill>
-            <a:srgbClr val="D34347"/>
+            <a:srgbClr val="E88B36"/>
           </a:solidFill>
           <a:ln>
             <a:noFill/>
@@ -8776,7 +8817,7 @@
         </p:nvSpPr>
         <p:spPr>
           <a:xfrm>
-            <a:off x="8412479" y="1618488"/>
+            <a:off x="4590288" y="1618488"/>
             <a:ext cx="1737360" cy="256032"/>
           </a:xfrm>
           <a:prstGeom prst="rect">
@@ -8805,7 +8846,7 @@
                 </a:solidFill>
                 <a:latin typeface="Microsoft YaHei"/>
               </a:rPr>
-              <a:t>算力</a:t>
+              <a:t>半导体芯片</a:t>
             </a:r>
           </a:p>
         </p:txBody>
@@ -8818,7 +8859,7 @@
         </p:nvSpPr>
         <p:spPr>
           <a:xfrm>
-            <a:off x="10698479" y="1636776"/>
+            <a:off x="6876288" y="1636776"/>
             <a:ext cx="877824" cy="228600"/>
           </a:xfrm>
           <a:prstGeom prst="rect">
@@ -8843,11 +8884,11 @@
             <a:r>
               <a:rPr sz="950" b="1" i="0">
                 <a:solidFill>
-                  <a:srgbClr val="D34347"/>
+                  <a:srgbClr val="E88B36"/>
                 </a:solidFill>
                 <a:latin typeface="Microsoft YaHei"/>
               </a:rPr>
-              <a:t>49.3 分</a:t>
+              <a:t>59.6 分</a:t>
             </a:r>
           </a:p>
         </p:txBody>
@@ -8860,7 +8901,7 @@
         </p:nvSpPr>
         <p:spPr>
           <a:xfrm>
-            <a:off x="8412479" y="1984248"/>
+            <a:off x="4590288" y="1984248"/>
             <a:ext cx="3154680" cy="310896"/>
           </a:xfrm>
           <a:prstGeom prst="rect">
@@ -8889,7 +8930,7 @@
                 </a:solidFill>
                 <a:latin typeface="Microsoft YaHei"/>
               </a:rPr>
-              <a:t>空→多跳级 1 只；空转多→多 2→9；反向转空 1 只</a:t>
+              <a:t>空转多→多 0→7</a:t>
             </a:r>
           </a:p>
         </p:txBody>
@@ -8902,7 +8943,7 @@
         </p:nvSpPr>
         <p:spPr>
           <a:xfrm>
-            <a:off x="8412479" y="2368296"/>
+            <a:off x="4590288" y="2368296"/>
             <a:ext cx="3154680" cy="566928"/>
           </a:xfrm>
           <a:prstGeom prst="rect">
@@ -8925,13 +8966,13 @@
               </a:spcAft>
             </a:pPr>
             <a:r>
-              <a:rPr sz="860" b="0" i="0">
+              <a:rPr sz="880" b="0" i="0">
                 <a:solidFill>
                   <a:srgbClr val="657484"/>
                 </a:solidFill>
                 <a:latin typeface="Microsoft YaHei"/>
               </a:rPr>
-              <a:t>深圳华强(000062)</a:t>
+              <a:t>空转多→多 7 只｜空→空转多 17 只｜多占比 13.5%</a:t>
             </a:r>
           </a:p>
         </p:txBody>
@@ -8944,7 +8985,7 @@
         </p:nvSpPr>
         <p:spPr>
           <a:xfrm>
-            <a:off x="8211311" y="3419856"/>
+            <a:off x="8211311" y="1481328"/>
             <a:ext cx="3584448" cy="1682496"/>
           </a:xfrm>
           <a:prstGeom prst="roundRect">
@@ -8991,7 +9032,7 @@
         </p:nvSpPr>
         <p:spPr>
           <a:xfrm>
-            <a:off x="8211311" y="3419856"/>
+            <a:off x="8211311" y="1481328"/>
             <a:ext cx="73152" cy="1682496"/>
           </a:xfrm>
           <a:prstGeom prst="rect">
@@ -9034,7 +9075,7 @@
         </p:nvSpPr>
         <p:spPr>
           <a:xfrm>
-            <a:off x="8412480" y="3557016"/>
+            <a:off x="8412480" y="1618488"/>
             <a:ext cx="1737360" cy="256032"/>
           </a:xfrm>
           <a:prstGeom prst="rect">
@@ -9063,7 +9104,7 @@
                 </a:solidFill>
                 <a:latin typeface="Microsoft YaHei"/>
               </a:rPr>
-              <a:t>商业航天</a:t>
+              <a:t>存储</a:t>
             </a:r>
           </a:p>
         </p:txBody>
@@ -9076,7 +9117,7 @@
         </p:nvSpPr>
         <p:spPr>
           <a:xfrm>
-            <a:off x="10698480" y="3575304"/>
+            <a:off x="10698480" y="1636776"/>
             <a:ext cx="877824" cy="228600"/>
           </a:xfrm>
           <a:prstGeom prst="rect">
@@ -9105,7 +9146,7 @@
                 </a:solidFill>
                 <a:latin typeface="Microsoft YaHei"/>
               </a:rPr>
-              <a:t>13.5 分</a:t>
+              <a:t>54.5 分</a:t>
             </a:r>
           </a:p>
         </p:txBody>
@@ -9118,7 +9159,7 @@
         </p:nvSpPr>
         <p:spPr>
           <a:xfrm>
-            <a:off x="8412480" y="3922776"/>
+            <a:off x="8412480" y="1984248"/>
             <a:ext cx="3154680" cy="310896"/>
           </a:xfrm>
           <a:prstGeom prst="rect">
@@ -9147,7 +9188,7 @@
                 </a:solidFill>
                 <a:latin typeface="Microsoft YaHei"/>
               </a:rPr>
-              <a:t>空转多→多 0→9；反向转空 10 只</a:t>
+              <a:t>空转多→多 1→1</a:t>
             </a:r>
           </a:p>
         </p:txBody>
@@ -9160,7 +9201,7 @@
         </p:nvSpPr>
         <p:spPr>
           <a:xfrm>
-            <a:off x="8412480" y="4306824"/>
+            <a:off x="8412480" y="2368296"/>
             <a:ext cx="3154680" cy="566928"/>
           </a:xfrm>
           <a:prstGeom prst="rect">
@@ -9183,13 +9224,13 @@
               </a:spcAft>
             </a:pPr>
             <a:r>
-              <a:rPr sz="860" b="0" i="0">
+              <a:rPr sz="880" b="0" i="0">
                 <a:solidFill>
                   <a:srgbClr val="657484"/>
                 </a:solidFill>
                 <a:latin typeface="Microsoft YaHei"/>
               </a:rPr>
-              <a:t>派克新材(605123)、航发控制(000738) 等 9 只</a:t>
+              <a:t>空转多→多 1 只｜空→空转多 4 只｜多占比 18.2%</a:t>
             </a:r>
           </a:p>
         </p:txBody>
@@ -9202,7 +9243,7 @@
         </p:nvSpPr>
         <p:spPr>
           <a:xfrm>
-            <a:off x="4389120" y="1481328"/>
+            <a:off x="566928" y="3419856"/>
             <a:ext cx="3584448" cy="1682496"/>
           </a:xfrm>
           <a:prstGeom prst="roundRect">
@@ -9249,14 +9290,14 @@
         </p:nvSpPr>
         <p:spPr>
           <a:xfrm>
-            <a:off x="4389120" y="1481328"/>
+            <a:off x="566928" y="3419856"/>
             <a:ext cx="73152" cy="1682496"/>
           </a:xfrm>
           <a:prstGeom prst="rect">
             <a:avLst/>
           </a:prstGeom>
           <a:solidFill>
-            <a:srgbClr val="E88B36"/>
+            <a:srgbClr val="D34347"/>
           </a:solidFill>
           <a:ln>
             <a:noFill/>
@@ -9292,7 +9333,7 @@
         </p:nvSpPr>
         <p:spPr>
           <a:xfrm>
-            <a:off x="4590288" y="1618488"/>
+            <a:off x="768096" y="3557016"/>
             <a:ext cx="1737360" cy="256032"/>
           </a:xfrm>
           <a:prstGeom prst="rect">
@@ -9321,7 +9362,7 @@
                 </a:solidFill>
                 <a:latin typeface="Microsoft YaHei"/>
               </a:rPr>
-              <a:t>半导体芯片</a:t>
+              <a:t>算力</a:t>
             </a:r>
           </a:p>
         </p:txBody>
@@ -9334,7 +9375,7 @@
         </p:nvSpPr>
         <p:spPr>
           <a:xfrm>
-            <a:off x="6876288" y="1636776"/>
+            <a:off x="3054096" y="3575304"/>
             <a:ext cx="877824" cy="228600"/>
           </a:xfrm>
           <a:prstGeom prst="rect">
@@ -9359,11 +9400,11 @@
             <a:r>
               <a:rPr sz="950" b="1" i="0">
                 <a:solidFill>
-                  <a:srgbClr val="E88B36"/>
+                  <a:srgbClr val="D34347"/>
                 </a:solidFill>
                 <a:latin typeface="Microsoft YaHei"/>
               </a:rPr>
-              <a:t>59.6 分</a:t>
+              <a:t>49.3 分</a:t>
             </a:r>
           </a:p>
         </p:txBody>
@@ -9376,7 +9417,7 @@
         </p:nvSpPr>
         <p:spPr>
           <a:xfrm>
-            <a:off x="4590288" y="1984248"/>
+            <a:off x="768096" y="3922776"/>
             <a:ext cx="3154680" cy="310896"/>
           </a:xfrm>
           <a:prstGeom prst="rect">
@@ -9405,7 +9446,7 @@
                 </a:solidFill>
                 <a:latin typeface="Microsoft YaHei"/>
               </a:rPr>
-              <a:t>空转多→多 0→7</a:t>
+              <a:t>空→多跳级 1 只；空转多→多 2→9；反向转空 1 只</a:t>
             </a:r>
           </a:p>
         </p:txBody>
@@ -9418,7 +9459,7 @@
         </p:nvSpPr>
         <p:spPr>
           <a:xfrm>
-            <a:off x="4590288" y="2368296"/>
+            <a:off x="768096" y="4306824"/>
             <a:ext cx="3154680" cy="566928"/>
           </a:xfrm>
           <a:prstGeom prst="rect">
@@ -9441,13 +9482,13 @@
               </a:spcAft>
             </a:pPr>
             <a:r>
-              <a:rPr sz="860" b="0" i="0">
+              <a:rPr sz="880" b="0" i="0">
                 <a:solidFill>
                   <a:srgbClr val="657484"/>
                 </a:solidFill>
                 <a:latin typeface="Microsoft YaHei"/>
               </a:rPr>
-              <a:t>博通集成(603068)、瑞芯微(603893) 等 7 只</a:t>
+              <a:t>空转多→多 9 只｜空→空转多 17 只｜多占比 21.3%</a:t>
             </a:r>
           </a:p>
         </p:txBody>
@@ -9460,7 +9501,7 @@
         </p:nvSpPr>
         <p:spPr>
           <a:xfrm>
-            <a:off x="566928" y="3419856"/>
+            <a:off x="4389120" y="3419856"/>
             <a:ext cx="3584448" cy="1682496"/>
           </a:xfrm>
           <a:prstGeom prst="roundRect">
@@ -9507,7 +9548,7 @@
         </p:nvSpPr>
         <p:spPr>
           <a:xfrm>
-            <a:off x="566928" y="3419856"/>
+            <a:off x="4389120" y="3419856"/>
             <a:ext cx="73152" cy="1682496"/>
           </a:xfrm>
           <a:prstGeom prst="rect">
@@ -9550,7 +9591,7 @@
         </p:nvSpPr>
         <p:spPr>
           <a:xfrm>
-            <a:off x="768096" y="3557016"/>
+            <a:off x="4590288" y="3557016"/>
             <a:ext cx="1737360" cy="256032"/>
           </a:xfrm>
           <a:prstGeom prst="rect">
@@ -9579,7 +9620,7 @@
                 </a:solidFill>
                 <a:latin typeface="Microsoft YaHei"/>
               </a:rPr>
-              <a:t>AI应用</a:t>
+              <a:t>光上游</a:t>
             </a:r>
           </a:p>
         </p:txBody>
@@ -9592,7 +9633,7 @@
         </p:nvSpPr>
         <p:spPr>
           <a:xfrm>
-            <a:off x="3054096" y="3575304"/>
+            <a:off x="6876288" y="3575304"/>
             <a:ext cx="877824" cy="228600"/>
           </a:xfrm>
           <a:prstGeom prst="rect">
@@ -9621,7 +9662,7 @@
                 </a:solidFill>
                 <a:latin typeface="Microsoft YaHei"/>
               </a:rPr>
-              <a:t>21.1 分</a:t>
+              <a:t>25.6 分</a:t>
             </a:r>
           </a:p>
         </p:txBody>
@@ -9634,7 +9675,7 @@
         </p:nvSpPr>
         <p:spPr>
           <a:xfrm>
-            <a:off x="768096" y="3922776"/>
+            <a:off x="4590288" y="3922776"/>
             <a:ext cx="3154680" cy="310896"/>
           </a:xfrm>
           <a:prstGeom prst="rect">
@@ -9663,7 +9704,7 @@
                 </a:solidFill>
                 <a:latin typeface="Microsoft YaHei"/>
               </a:rPr>
-              <a:t>空转多→多 1→5；反向转空 5 只</a:t>
+              <a:t>空转多→多 0→2</a:t>
             </a:r>
           </a:p>
         </p:txBody>
@@ -9676,7 +9717,7 @@
         </p:nvSpPr>
         <p:spPr>
           <a:xfrm>
-            <a:off x="768096" y="4306824"/>
+            <a:off x="4590288" y="4306824"/>
             <a:ext cx="3154680" cy="566928"/>
           </a:xfrm>
           <a:prstGeom prst="rect">
@@ -9699,13 +9740,13 @@
               </a:spcAft>
             </a:pPr>
             <a:r>
-              <a:rPr sz="860" b="0" i="0">
+              <a:rPr sz="880" b="0" i="0">
                 <a:solidFill>
                   <a:srgbClr val="657484"/>
                 </a:solidFill>
                 <a:latin typeface="Microsoft YaHei"/>
               </a:rPr>
-              <a:t>汉得信息(300170)、达实智能(002421) 等 5 只</a:t>
+              <a:t>空转多→多 2 只｜空→空转多 6 只｜多占比 10.3%</a:t>
             </a:r>
           </a:p>
         </p:txBody>
@@ -9718,7 +9759,7 @@
         </p:nvSpPr>
         <p:spPr>
           <a:xfrm>
-            <a:off x="4389120" y="3419856"/>
+            <a:off x="8211311" y="3419856"/>
             <a:ext cx="3584448" cy="1682496"/>
           </a:xfrm>
           <a:prstGeom prst="roundRect">
@@ -9765,14 +9806,14 @@
         </p:nvSpPr>
         <p:spPr>
           <a:xfrm>
-            <a:off x="4389120" y="3419856"/>
+            <a:off x="8211311" y="3419856"/>
             <a:ext cx="73152" cy="1682496"/>
           </a:xfrm>
           <a:prstGeom prst="rect">
             <a:avLst/>
           </a:prstGeom>
           <a:solidFill>
-            <a:srgbClr val="D34347"/>
+            <a:srgbClr val="E88B36"/>
           </a:solidFill>
           <a:ln>
             <a:noFill/>
@@ -9808,7 +9849,7 @@
         </p:nvSpPr>
         <p:spPr>
           <a:xfrm>
-            <a:off x="4590289" y="3557016"/>
+            <a:off x="8412480" y="3557016"/>
             <a:ext cx="1737360" cy="256032"/>
           </a:xfrm>
           <a:prstGeom prst="rect">
@@ -9837,7 +9878,7 @@
                 </a:solidFill>
                 <a:latin typeface="Microsoft YaHei"/>
               </a:rPr>
-              <a:t>PCB</a:t>
+              <a:t>药</a:t>
             </a:r>
           </a:p>
         </p:txBody>
@@ -9850,7 +9891,7 @@
         </p:nvSpPr>
         <p:spPr>
           <a:xfrm>
-            <a:off x="6876289" y="3575304"/>
+            <a:off x="10698480" y="3575304"/>
             <a:ext cx="877824" cy="228600"/>
           </a:xfrm>
           <a:prstGeom prst="rect">
@@ -9875,11 +9916,11 @@
             <a:r>
               <a:rPr sz="950" b="1" i="0">
                 <a:solidFill>
-                  <a:srgbClr val="D34347"/>
+                  <a:srgbClr val="E88B36"/>
                 </a:solidFill>
                 <a:latin typeface="Microsoft YaHei"/>
               </a:rPr>
-              <a:t>15.7 分</a:t>
+              <a:t>24.8 分</a:t>
             </a:r>
           </a:p>
         </p:txBody>
@@ -9892,7 +9933,7 @@
         </p:nvSpPr>
         <p:spPr>
           <a:xfrm>
-            <a:off x="4590289" y="3922776"/>
+            <a:off x="8412480" y="3922776"/>
             <a:ext cx="3154680" cy="310896"/>
           </a:xfrm>
           <a:prstGeom prst="rect">
@@ -9921,7 +9962,7 @@
                 </a:solidFill>
                 <a:latin typeface="Microsoft YaHei"/>
               </a:rPr>
-              <a:t>空→多跳级 1 只；空转多→多 0→2；反向转空 2 只</a:t>
+              <a:t>空转多→多 2→3；反向转空 1 只</a:t>
             </a:r>
           </a:p>
         </p:txBody>
@@ -9934,7 +9975,7 @@
         </p:nvSpPr>
         <p:spPr>
           <a:xfrm>
-            <a:off x="4590289" y="4306824"/>
+            <a:off x="8412480" y="4306824"/>
             <a:ext cx="3154680" cy="566928"/>
           </a:xfrm>
           <a:prstGeom prst="rect">
@@ -9957,13 +9998,13 @@
               </a:spcAft>
             </a:pPr>
             <a:r>
-              <a:rPr sz="860" b="0" i="0">
+              <a:rPr sz="880" b="0" i="0">
                 <a:solidFill>
                   <a:srgbClr val="657484"/>
                 </a:solidFill>
                 <a:latin typeface="Microsoft YaHei"/>
               </a:rPr>
-              <a:t>华锐精密(688059)</a:t>
+              <a:t>空转多→多 3 只｜空→空转多 28 只｜多占比 12.0%</a:t>
             </a:r>
           </a:p>
         </p:txBody>
